--- a/docs/Hexagon-Bridge-Submission.pptx
+++ b/docs/Hexagon-Bridge-Submission.pptx
@@ -1548,7 +1548,7 @@
           <a:p>
             <a:r>
               <a:rPr lang="en-US" dirty="0"/>
-              <a:t>Stating limits next to results is the point: the project exists because this stack fails quietly, and a tool that overclaims would be part of that problem.</a:t>
+              <a:t>The scope line is deliberate: the speedups are encoder speedups, and the deck says so rather than letting a tester discover it.</a:t>
             </a:r>
             <a:endParaRPr lang="en-US" dirty="0"/>
           </a:p>
@@ -2331,7 +2331,7 @@
                 <a:ea typeface="Cambria" pitchFamily="34" charset="-122"/>
                 <a:cs typeface="Cambria" pitchFamily="34" charset="-120"/>
               </a:rPr>
-              <a:t>31 tests</a:t>
+              <a:t>48 tests</a:t>
             </a:r>
             <a:endParaRPr lang="en-US" sz="4000" dirty="0"/>
           </a:p>
@@ -4105,7 +4105,7 @@
         <p:spPr>
           <a:xfrm>
             <a:off x="6492240" y="1737360"/>
-            <a:ext cx="2743200" cy="685800"/>
+            <a:ext cx="2651760" cy="685800"/>
           </a:xfrm>
           <a:prstGeom prst="rect">
             <a:avLst/>
@@ -4144,7 +4144,7 @@
         <p:spPr>
           <a:xfrm>
             <a:off x="6492240" y="2395728"/>
-            <a:ext cx="2743200" cy="685800"/>
+            <a:ext cx="2651760" cy="685800"/>
           </a:xfrm>
           <a:prstGeom prst="rect">
             <a:avLst/>
@@ -4168,7 +4168,7 @@
                 <a:ea typeface="Calibri" pitchFamily="34" charset="-122"/>
                 <a:cs typeface="Calibri" pitchFamily="34" charset="-120"/>
               </a:rPr>
-              <a:t>word error rate — identical to the FP32 reference</a:t>
+              <a:t>word error rate on CPU, identical to FP32 (14.07% with the encoder on the NPU)</a:t>
             </a:r>
             <a:endParaRPr lang="en-US" sz="1250" dirty="0"/>
           </a:p>
@@ -6316,7 +6316,7 @@
                           <a:ea typeface="Calibri" pitchFamily="34" charset="-122"/>
                           <a:cs typeface="Calibri" pitchFamily="34" charset="-120"/>
                         </a:rPr>
-                        <a:t>100% → 63.3% → 75.0% same top hit</a:t>
+                        <a:t>100% → 63.3% → 97.3% same top hit</a:t>
                       </a:r>
                       <a:endParaRPr lang="en-US" sz="1300" dirty="0">
                         <a:latin typeface="Calibri" charset="0"/>
@@ -6384,7 +6384,7 @@
                           <a:ea typeface="Calibri" pitchFamily="34" charset="-122"/>
                           <a:cs typeface="Calibri" pitchFamily="34" charset="-120"/>
                         </a:rPr>
-                        <a:t>1.29 ms</a:t>
+                        <a:t>1.30 ms</a:t>
                       </a:r>
                       <a:endParaRPr lang="en-US" sz="1300" dirty="0">
                         <a:latin typeface="Calibri" charset="0"/>
@@ -7048,7 +7048,7 @@
                 <a:ea typeface="Cambria" pitchFamily="34" charset="-122"/>
                 <a:cs typeface="Cambria" pitchFamily="34" charset="-120"/>
               </a:rPr>
-              <a:t>The exporter mattered more than the quantizer</a:t>
+              <a:t>Two settings decided four of these five</a:t>
             </a:r>
             <a:endParaRPr lang="en-US" sz="1800" dirty="0"/>
           </a:p>
@@ -7090,7 +7090,7 @@
                 <a:ea typeface="Calibri" pitchFamily="34" charset="-122"/>
                 <a:cs typeface="Calibri" pitchFamily="34" charset="-120"/>
               </a:rPr>
-              <a:t>PyTorch's newer exporter decomposes attention into a graph carrying GatherND and IsNaN. That split every transformer here into two NPU graphs, and on the real device they then failed to allocate memory at all. Exporting with the TorchScript exporter and eager attention removed those ops — the same models then compiled into one graph and ran. The model was never the problem.</a:t>
+              <a:t>Weight granularity: per-tensor weights gave MobileNetV2 1.2% top-1 and cost MiniLM a quarter of its search hits — both with flawless NPU placement. Per-channel fixed both, for 0.01 ms. And the exporter, not the quantizer, split every transformer here in two: PyTorch's newer exporter emits GatherND and IsNaN, which the device refused outright (QNN_COMMON_ERROR_MEM_ALLOC). Exported the older way, the same models compiled into one graph and ran.</a:t>
             </a:r>
             <a:endParaRPr lang="en-US" sz="1300" dirty="0"/>
           </a:p>
@@ -7426,7 +7426,7 @@
                 <a:ea typeface="Cambria" pitchFamily="34" charset="-122"/>
                 <a:cs typeface="Cambria" pitchFamily="34" charset="-120"/>
               </a:rPr>
-              <a:t>Read it honestly</a:t>
+              <a:t>What this comparison does and does not say</a:t>
             </a:r>
             <a:endParaRPr lang="en-US" sz="1800" dirty="0"/>
           </a:p>
@@ -8304,7 +8304,7 @@
                 <a:ea typeface="Cambria" pitchFamily="34" charset="-122"/>
                 <a:cs typeface="Cambria" pitchFamily="34" charset="-120"/>
               </a:rPr>
-              <a:t>What I did not prove</a:t>
+              <a:t>Check every number in this deck</a:t>
             </a:r>
             <a:endParaRPr lang="en-US" sz="3400" dirty="0"/>
           </a:p>
@@ -8343,7 +8343,7 @@
                 <a:ea typeface="Calibri" pitchFamily="34" charset="-122"/>
                 <a:cs typeface="Calibri" pitchFamily="34" charset="-120"/>
               </a:rPr>
-              <a:t>The same document that carries the wins carries these</a:t>
+              <a:t>Nothing here asks to be taken on trust</a:t>
             </a:r>
             <a:endParaRPr lang="en-US" sz="1400" dirty="0"/>
           </a:p>
@@ -8358,11 +8358,11 @@
         <p:spPr>
           <a:xfrm>
             <a:off x="640080" y="1645920"/>
-            <a:ext cx="10911535" cy="1097280"/>
+            <a:ext cx="10911535" cy="868680"/>
           </a:xfrm>
           <a:prstGeom prst="roundRect">
             <a:avLst>
-              <a:gd name="adj" fmla="val 6667"/>
+              <a:gd name="adj" fmla="val 8421"/>
             </a:avLst>
           </a:prstGeom>
           <a:solidFill>
@@ -8384,17 +8384,17 @@
         </p:nvSpPr>
         <p:spPr>
           <a:xfrm>
-            <a:off x="1005840" y="1810512"/>
-            <a:ext cx="3931920" cy="731520"/>
-          </a:xfrm>
-          <a:prstGeom prst="rect">
-            <a:avLst/>
-          </a:prstGeom>
-          <a:noFill/>
-          <a:ln/>
-        </p:spPr>
-        <p:txBody>
-          <a:bodyPr wrap="square" lIns="0" tIns="0" rIns="0" bIns="0" rtlCol="0" anchor="t"/>
+            <a:off x="1005840" y="1755648"/>
+            <a:ext cx="3017520" cy="640080"/>
+          </a:xfrm>
+          <a:prstGeom prst="rect">
+            <a:avLst/>
+          </a:prstGeom>
+          <a:noFill/>
+          <a:ln/>
+        </p:spPr>
+        <p:txBody>
+          <a:bodyPr wrap="square" lIns="0" tIns="0" rIns="0" bIns="0" rtlCol="0" anchor="ctr"/>
           <a:lstStyle/>
           <a:p>
             <a:pPr indent="0" marL="0">
@@ -8409,7 +8409,7 @@
                 <a:ea typeface="Calibri" pitchFamily="34" charset="-122"/>
                 <a:cs typeface="Calibri" pitchFamily="34" charset="-120"/>
               </a:rPr>
-              <a:t>Only the encoder is on the NPU</a:t>
+              <a:t>The evidence index</a:t>
             </a:r>
             <a:endParaRPr lang="en-US" sz="1550" dirty="0"/>
           </a:p>
@@ -8423,27 +8423,24 @@
         </p:nvSpPr>
         <p:spPr>
           <a:xfrm>
-            <a:off x="5120640" y="1810512"/>
-            <a:ext cx="6065215" cy="777240"/>
-          </a:xfrm>
-          <a:prstGeom prst="rect">
-            <a:avLst/>
-          </a:prstGeom>
-          <a:noFill/>
-          <a:ln/>
-        </p:spPr>
-        <p:txBody>
-          <a:bodyPr wrap="square" lIns="0" tIns="0" rIns="0" bIns="0" rtlCol="0" anchor="t"/>
-          <a:lstStyle/>
-          <a:p>
-            <a:pPr indent="0" marL="0">
-              <a:lnSpc>
-                <a:spcPts val="1700"/>
-              </a:lnSpc>
-              <a:buNone/>
-            </a:pPr>
-            <a:r>
-              <a:rPr lang="en-US" sz="1300" dirty="0">
+            <a:off x="4206240" y="1755648"/>
+            <a:ext cx="6979615" cy="640080"/>
+          </a:xfrm>
+          <a:prstGeom prst="rect">
+            <a:avLst/>
+          </a:prstGeom>
+          <a:noFill/>
+          <a:ln/>
+        </p:spPr>
+        <p:txBody>
+          <a:bodyPr wrap="square" lIns="0" tIns="0" rIns="0" bIns="0" rtlCol="0" anchor="ctr"/>
+          <a:lstStyle/>
+          <a:p>
+            <a:pPr indent="0" marL="0">
+              <a:buNone/>
+            </a:pPr>
+            <a:r>
+              <a:rPr lang="en-US" sz="1250" dirty="0">
                 <a:solidFill>
                   <a:srgbClr val="23272E"/>
                 </a:solidFill>
@@ -8451,9 +8448,9 @@
                 <a:ea typeface="Calibri" pitchFamily="34" charset="-122"/>
                 <a:cs typeface="Calibri" pitchFamily="34" charset="-120"/>
               </a:rPr>
-              <a:t>The decoder still runs on CPU here. The speedups quoted are encoder speedups. Qualcomm's decoder measurement shows it can live on the NPU; wiring it in needs a physical device to verify.</a:t>
-            </a:r>
-            <a:endParaRPr lang="en-US" sz="1300" dirty="0"/>
+              <a:t>models/reports/README.md lists every claim next to the file that backs it — machine-readable results, not prose.</a:t>
+            </a:r>
+            <a:endParaRPr lang="en-US" sz="1250" dirty="0"/>
           </a:p>
         </p:txBody>
       </p:sp>
@@ -8465,12 +8462,12 @@
         </p:nvSpPr>
         <p:spPr>
           <a:xfrm>
-            <a:off x="640080" y="2852928"/>
-            <a:ext cx="10911535" cy="1097280"/>
+            <a:off x="640080" y="2633472"/>
+            <a:ext cx="10911535" cy="868680"/>
           </a:xfrm>
           <a:prstGeom prst="roundRect">
             <a:avLst>
-              <a:gd name="adj" fmla="val 6667"/>
+              <a:gd name="adj" fmla="val 8421"/>
             </a:avLst>
           </a:prstGeom>
           <a:solidFill>
@@ -8492,17 +8489,17 @@
         </p:nvSpPr>
         <p:spPr>
           <a:xfrm>
-            <a:off x="1005840" y="3017520"/>
-            <a:ext cx="3931920" cy="731520"/>
-          </a:xfrm>
-          <a:prstGeom prst="rect">
-            <a:avLst/>
-          </a:prstGeom>
-          <a:noFill/>
-          <a:ln/>
-        </p:spPr>
-        <p:txBody>
-          <a:bodyPr wrap="square" lIns="0" tIns="0" rIns="0" bIns="0" rtlCol="0" anchor="t"/>
+            <a:off x="1005840" y="2743200"/>
+            <a:ext cx="3017520" cy="640080"/>
+          </a:xfrm>
+          <a:prstGeom prst="rect">
+            <a:avLst/>
+          </a:prstGeom>
+          <a:noFill/>
+          <a:ln/>
+        </p:spPr>
+        <p:txBody>
+          <a:bodyPr wrap="square" lIns="0" tIns="0" rIns="0" bIns="0" rtlCol="0" anchor="ctr"/>
           <a:lstStyle/>
           <a:p>
             <a:pPr indent="0" marL="0">
@@ -8517,7 +8514,7 @@
                 <a:ea typeface="Calibri" pitchFamily="34" charset="-122"/>
                 <a:cs typeface="Calibri" pitchFamily="34" charset="-120"/>
               </a:rPr>
-              <a:t>Speedup depends on the CPU baseline</a:t>
+              <a:t>The device's own logs</a:t>
             </a:r>
             <a:endParaRPr lang="en-US" sz="1550" dirty="0"/>
           </a:p>
@@ -8531,27 +8528,24 @@
         </p:nvSpPr>
         <p:spPr>
           <a:xfrm>
-            <a:off x="5120640" y="3017520"/>
-            <a:ext cx="6065215" cy="777240"/>
-          </a:xfrm>
-          <a:prstGeom prst="rect">
-            <a:avLst/>
-          </a:prstGeom>
-          <a:noFill/>
-          <a:ln/>
-        </p:spPr>
-        <p:txBody>
-          <a:bodyPr wrap="square" lIns="0" tIns="0" rIns="0" bIns="0" rtlCol="0" anchor="t"/>
-          <a:lstStyle/>
-          <a:p>
-            <a:pPr indent="0" marL="0">
-              <a:lnSpc>
-                <a:spcPts val="1700"/>
-              </a:lnSpc>
-              <a:buNone/>
-            </a:pPr>
-            <a:r>
-              <a:rPr lang="en-US" sz="1300" dirty="0">
+            <a:off x="4206240" y="2743200"/>
+            <a:ext cx="6979615" cy="640080"/>
+          </a:xfrm>
+          <a:prstGeom prst="rect">
+            <a:avLst/>
+          </a:prstGeom>
+          <a:noFill/>
+          <a:ln/>
+        </p:spPr>
+        <p:txBody>
+          <a:bodyPr wrap="square" lIns="0" tIns="0" rIns="0" bIns="0" rtlCol="0" anchor="ctr"/>
+          <a:lstStyle/>
+          <a:p>
+            <a:pPr indent="0" marL="0">
+              <a:buNone/>
+            </a:pPr>
+            <a:r>
+              <a:rPr lang="en-US" sz="1250" dirty="0">
                 <a:solidFill>
                   <a:srgbClr val="23272E"/>
                 </a:solidFill>
@@ -8559,9 +8553,9 @@
                 <a:ea typeface="Calibri" pitchFamily="34" charset="-122"/>
                 <a:cs typeface="Calibri" pitchFamily="34" charset="-120"/>
               </a:rPr>
-              <a:t>24–57× against AI Hub's CPU numbers, but 4–10× against a well-tuned CPU. The honest figure needs a physical X Elite.</a:t>
-            </a:r>
-            <a:endParaRPr lang="en-US" sz="1300" dirty="0"/>
+              <a:t>Raw runtime logs from the runs themselves are committed, including the failures: the chip refusing a model, naming the operator and the error code.</a:t>
+            </a:r>
+            <a:endParaRPr lang="en-US" sz="1250" dirty="0"/>
           </a:p>
         </p:txBody>
       </p:sp>
@@ -8573,12 +8567,12 @@
         </p:nvSpPr>
         <p:spPr>
           <a:xfrm>
-            <a:off x="640080" y="4059936"/>
-            <a:ext cx="10911535" cy="1097280"/>
+            <a:off x="640080" y="3621024"/>
+            <a:ext cx="10911535" cy="868680"/>
           </a:xfrm>
           <a:prstGeom prst="roundRect">
             <a:avLst>
-              <a:gd name="adj" fmla="val 6667"/>
+              <a:gd name="adj" fmla="val 8421"/>
             </a:avLst>
           </a:prstGeom>
           <a:solidFill>
@@ -8600,17 +8594,17 @@
         </p:nvSpPr>
         <p:spPr>
           <a:xfrm>
-            <a:off x="1005840" y="4224528"/>
-            <a:ext cx="3931920" cy="731520"/>
-          </a:xfrm>
-          <a:prstGeom prst="rect">
-            <a:avLst/>
-          </a:prstGeom>
-          <a:noFill/>
-          <a:ln/>
-        </p:spPr>
-        <p:txBody>
-          <a:bodyPr wrap="square" lIns="0" tIns="0" rIns="0" bIns="0" rtlCol="0" anchor="t"/>
+            <a:off x="1005840" y="3730752"/>
+            <a:ext cx="3017520" cy="640080"/>
+          </a:xfrm>
+          <a:prstGeom prst="rect">
+            <a:avLst/>
+          </a:prstGeom>
+          <a:noFill/>
+          <a:ln/>
+        </p:spPr>
+        <p:txBody>
+          <a:bodyPr wrap="square" lIns="0" tIns="0" rIns="0" bIns="0" rtlCol="0" anchor="ctr"/>
           <a:lstStyle/>
           <a:p>
             <a:pPr indent="0" marL="0">
@@ -8625,7 +8619,7 @@
                 <a:ea typeface="Calibri" pitchFamily="34" charset="-122"/>
                 <a:cs typeface="Calibri" pitchFamily="34" charset="-120"/>
               </a:rPr>
-              <a:t>No power or battery measurement</a:t>
+              <a:t>The job IDs</a:t>
             </a:r>
             <a:endParaRPr lang="en-US" sz="1550" dirty="0"/>
           </a:p>
@@ -8639,27 +8633,24 @@
         </p:nvSpPr>
         <p:spPr>
           <a:xfrm>
-            <a:off x="5120640" y="4224528"/>
-            <a:ext cx="6065215" cy="777240"/>
-          </a:xfrm>
-          <a:prstGeom prst="rect">
-            <a:avLst/>
-          </a:prstGeom>
-          <a:noFill/>
-          <a:ln/>
-        </p:spPr>
-        <p:txBody>
-          <a:bodyPr wrap="square" lIns="0" tIns="0" rIns="0" bIns="0" rtlCol="0" anchor="t"/>
-          <a:lstStyle/>
-          <a:p>
-            <a:pPr indent="0" marL="0">
-              <a:lnSpc>
-                <a:spcPts val="1700"/>
-              </a:lnSpc>
-              <a:buNone/>
-            </a:pPr>
-            <a:r>
-              <a:rPr lang="en-US" sz="1300" dirty="0">
+            <a:off x="4206240" y="3730752"/>
+            <a:ext cx="6979615" cy="640080"/>
+          </a:xfrm>
+          <a:prstGeom prst="rect">
+            <a:avLst/>
+          </a:prstGeom>
+          <a:noFill/>
+          <a:ln/>
+        </p:spPr>
+        <p:txBody>
+          <a:bodyPr wrap="square" lIns="0" tIns="0" rIns="0" bIns="0" rtlCol="0" anchor="ctr"/>
+          <a:lstStyle/>
+          <a:p>
+            <a:pPr indent="0" marL="0">
+              <a:buNone/>
+            </a:pPr>
+            <a:r>
+              <a:rPr lang="en-US" sz="1250" dirty="0">
                 <a:solidFill>
                   <a:srgbClr val="23272E"/>
                 </a:solidFill>
@@ -8667,9 +8658,9 @@
                 <a:ea typeface="Calibri" pitchFamily="34" charset="-122"/>
                 <a:cs typeface="Calibri" pitchFamily="34" charset="-120"/>
               </a:rPr>
-              <a:t>AI Hub doesn't expose it. The efficiency argument for an NPU is the one thing I could not measure.</a:t>
-            </a:r>
-            <a:endParaRPr lang="en-US" sz="1300" dirty="0"/>
+              <a:t>Every measurement carries the profiling job that produced it, so each number traces to one run on one device.</a:t>
+            </a:r>
+            <a:endParaRPr lang="en-US" sz="1250" dirty="0"/>
           </a:p>
         </p:txBody>
       </p:sp>
@@ -8681,12 +8672,12 @@
         </p:nvSpPr>
         <p:spPr>
           <a:xfrm>
-            <a:off x="640080" y="5266944"/>
-            <a:ext cx="10911535" cy="1097280"/>
+            <a:off x="640080" y="4608576"/>
+            <a:ext cx="10911535" cy="868680"/>
           </a:xfrm>
           <a:prstGeom prst="roundRect">
             <a:avLst>
-              <a:gd name="adj" fmla="val 6667"/>
+              <a:gd name="adj" fmla="val 8421"/>
             </a:avLst>
           </a:prstGeom>
           <a:solidFill>
@@ -8708,17 +8699,17 @@
         </p:nvSpPr>
         <p:spPr>
           <a:xfrm>
-            <a:off x="1005840" y="5431536"/>
-            <a:ext cx="3931920" cy="731520"/>
-          </a:xfrm>
-          <a:prstGeom prst="rect">
-            <a:avLst/>
-          </a:prstGeom>
-          <a:noFill/>
-          <a:ln/>
-        </p:spPr>
-        <p:txBody>
-          <a:bodyPr wrap="square" lIns="0" tIns="0" rIns="0" bIns="0" rtlCol="0" anchor="t"/>
+            <a:off x="1005840" y="4718304"/>
+            <a:ext cx="3017520" cy="640080"/>
+          </a:xfrm>
+          <a:prstGeom prst="rect">
+            <a:avLst/>
+          </a:prstGeom>
+          <a:noFill/>
+          <a:ln/>
+        </p:spPr>
+        <p:txBody>
+          <a:bodyPr wrap="square" lIns="0" tIns="0" rIns="0" bIns="0" rtlCol="0" anchor="ctr"/>
           <a:lstStyle/>
           <a:p>
             <a:pPr indent="0" marL="0">
@@ -8733,7 +8724,7 @@
                 <a:ea typeface="Calibri" pitchFamily="34" charset="-122"/>
                 <a:cs typeface="Calibri" pitchFamily="34" charset="-120"/>
               </a:rPr>
-              <a:t>MiniLM loses retrieval quality</a:t>
+              <a:t>The tests</a:t>
             </a:r>
             <a:endParaRPr lang="en-US" sz="1550" dirty="0"/>
           </a:p>
@@ -8747,27 +8738,24 @@
         </p:nvSpPr>
         <p:spPr>
           <a:xfrm>
-            <a:off x="5120640" y="5431536"/>
-            <a:ext cx="6065215" cy="777240"/>
-          </a:xfrm>
-          <a:prstGeom prst="rect">
-            <a:avLst/>
-          </a:prstGeom>
-          <a:noFill/>
-          <a:ln/>
-        </p:spPr>
-        <p:txBody>
-          <a:bodyPr wrap="square" lIns="0" tIns="0" rIns="0" bIns="0" rtlCol="0" anchor="t"/>
-          <a:lstStyle/>
-          <a:p>
-            <a:pPr indent="0" marL="0">
-              <a:lnSpc>
-                <a:spcPts val="1700"/>
-              </a:lnSpc>
-              <a:buNone/>
-            </a:pPr>
-            <a:r>
-              <a:rPr lang="en-US" sz="1300" dirty="0">
+            <a:off x="4206240" y="4718304"/>
+            <a:ext cx="6979615" cy="640080"/>
+          </a:xfrm>
+          <a:prstGeom prst="rect">
+            <a:avLst/>
+          </a:prstGeom>
+          <a:noFill/>
+          <a:ln/>
+        </p:spPr>
+        <p:txBody>
+          <a:bodyPr wrap="square" lIns="0" tIns="0" rIns="0" bIns="0" rtlCol="0" anchor="ctr"/>
+          <a:lstStyle/>
+          <a:p>
+            <a:pPr indent="0" marL="0">
+              <a:buNone/>
+            </a:pPr>
+            <a:r>
+              <a:rPr lang="en-US" sz="1250" dirty="0">
                 <a:solidFill>
                   <a:srgbClr val="23272E"/>
                 </a:solidFill>
@@ -8775,9 +8763,153 @@
                 <a:ea typeface="Calibri" pitchFamily="34" charset="-122"/>
                 <a:cs typeface="Calibri" pitchFamily="34" charset="-120"/>
               </a:rPr>
-              <a:t>75.0% same top hit vs FP32. Embedding cosine of 0.987 looks fine and hides it — a16w8 is not free for every model.</a:t>
-            </a:r>
-            <a:endParaRPr lang="en-US" sz="1300" dirty="0"/>
+              <a:t>49 tests, each pinning a bug that once produced a wrong number, run on every push — on Windows with the QNN plugin as well as Linux.</a:t>
+            </a:r>
+            <a:endParaRPr lang="en-US" sz="1250" dirty="0"/>
+          </a:p>
+        </p:txBody>
+      </p:sp>
+      <p:sp>
+        <p:nvSpPr>
+          <p:cNvPr id="16" name="Shape 14"/>
+          <p:cNvSpPr/>
+          <p:nvPr/>
+        </p:nvSpPr>
+        <p:spPr>
+          <a:xfrm>
+            <a:off x="640080" y="5596128"/>
+            <a:ext cx="10911535" cy="868680"/>
+          </a:xfrm>
+          <a:prstGeom prst="roundRect">
+            <a:avLst>
+              <a:gd name="adj" fmla="val 8421"/>
+            </a:avLst>
+          </a:prstGeom>
+          <a:solidFill>
+            <a:srgbClr val="F4F6F8"/>
+          </a:solidFill>
+          <a:ln w="12700">
+            <a:solidFill>
+              <a:srgbClr val="F4F6F8"/>
+            </a:solidFill>
+            <a:prstDash val="solid"/>
+          </a:ln>
+        </p:spPr>
+      </p:sp>
+      <p:sp>
+        <p:nvSpPr>
+          <p:cNvPr id="17" name="Text 15"/>
+          <p:cNvSpPr txBox="1"/>
+          <p:nvPr/>
+        </p:nvSpPr>
+        <p:spPr>
+          <a:xfrm>
+            <a:off x="1005840" y="5705856"/>
+            <a:ext cx="3017520" cy="640080"/>
+          </a:xfrm>
+          <a:prstGeom prst="rect">
+            <a:avLst/>
+          </a:prstGeom>
+          <a:noFill/>
+          <a:ln/>
+        </p:spPr>
+        <p:txBody>
+          <a:bodyPr wrap="square" lIns="0" tIns="0" rIns="0" bIns="0" rtlCol="0" anchor="ctr"/>
+          <a:lstStyle/>
+          <a:p>
+            <a:pPr indent="0" marL="0">
+              <a:buNone/>
+            </a:pPr>
+            <a:r>
+              <a:rPr lang="en-US" sz="1550" b="1" dirty="0">
+                <a:solidFill>
+                  <a:srgbClr val="1A2238"/>
+                </a:solidFill>
+                <a:latin typeface="Calibri" pitchFamily="34" charset="0"/>
+                <a:ea typeface="Calibri" pitchFamily="34" charset="-122"/>
+                <a:cs typeface="Calibri" pitchFamily="34" charset="-120"/>
+              </a:rPr>
+              <a:t>One command</a:t>
+            </a:r>
+            <a:endParaRPr lang="en-US" sz="1550" dirty="0"/>
+          </a:p>
+        </p:txBody>
+      </p:sp>
+      <p:sp>
+        <p:nvSpPr>
+          <p:cNvPr id="18" name="Text 16"/>
+          <p:cNvSpPr txBox="1"/>
+          <p:nvPr/>
+        </p:nvSpPr>
+        <p:spPr>
+          <a:xfrm>
+            <a:off x="4206240" y="5705856"/>
+            <a:ext cx="6979615" cy="640080"/>
+          </a:xfrm>
+          <a:prstGeom prst="rect">
+            <a:avLst/>
+          </a:prstGeom>
+          <a:noFill/>
+          <a:ln/>
+        </p:spPr>
+        <p:txBody>
+          <a:bodyPr wrap="square" lIns="0" tIns="0" rIns="0" bIns="0" rtlCol="0" anchor="ctr"/>
+          <a:lstStyle/>
+          <a:p>
+            <a:pPr indent="0" marL="0">
+              <a:buNone/>
+            </a:pPr>
+            <a:r>
+              <a:rPr lang="en-US" sz="1250" dirty="0">
+                <a:solidFill>
+                  <a:srgbClr val="23272E"/>
+                </a:solidFill>
+                <a:latin typeface="Calibri" pitchFamily="34" charset="0"/>
+                <a:ea typeface="Calibri" pitchFamily="34" charset="-122"/>
+                <a:cs typeface="Calibri" pitchFamily="34" charset="-120"/>
+              </a:rPr>
+              <a:t>python -m tools.model_zoo rebuilds the five-model comparison from scratch; python -m scanner checks any model you bring.</a:t>
+            </a:r>
+            <a:endParaRPr lang="en-US" sz="1250" dirty="0"/>
+          </a:p>
+        </p:txBody>
+      </p:sp>
+      <p:sp>
+        <p:nvSpPr>
+          <p:cNvPr id="19" name="Text 17"/>
+          <p:cNvSpPr txBox="1"/>
+          <p:nvPr/>
+        </p:nvSpPr>
+        <p:spPr>
+          <a:xfrm>
+            <a:off x="640080" y="6400800"/>
+            <a:ext cx="10911535" cy="365760"/>
+          </a:xfrm>
+          <a:prstGeom prst="rect">
+            <a:avLst/>
+          </a:prstGeom>
+          <a:noFill/>
+          <a:ln/>
+        </p:spPr>
+        <p:txBody>
+          <a:bodyPr wrap="square" lIns="0" tIns="0" rIns="0" bIns="0" rtlCol="0" anchor="ctr"/>
+          <a:lstStyle/>
+          <a:p>
+            <a:pPr indent="0" marL="0">
+              <a:buNone/>
+            </a:pPr>
+            <a:r>
+              <a:rPr lang="en-US" sz="1200" i="1" dirty="0">
+                <a:solidFill>
+                  <a:srgbClr val="6B7280"/>
+                </a:solidFill>
+                <a:latin typeface="Calibri" pitchFamily="34" charset="0"/>
+                <a:ea typeface="Calibri" pitchFamily="34" charset="-122"/>
+                <a:cs typeface="Calibri" pitchFamily="34" charset="-120"/>
+              </a:rPr>
+              <a:t>Scope, precisely: the encoder runs on the NPU and the decoder on CPU in the shipping app — every latency quoted here is an encoder latency.</a:t>
+            </a:r>
+            <a:endParaRPr lang="en-US" sz="1200" dirty="0"/>
           </a:p>
         </p:txBody>
       </p:sp>
